--- a/case_tidur.pptx
+++ b/case_tidur.pptx
@@ -144,7 +144,7 @@
       </p:grpSpPr>
       <p:sp>
         <p:nvSpPr>
-          <p:cNvPr id="143754950" name="Header Placeholder 1"/>
+          <p:cNvPr id="1369094922" name="Header Placeholder 1"/>
           <p:cNvSpPr>
             <a:spLocks noGrp="1"/>
           </p:cNvSpPr>
@@ -178,7 +178,7 @@
       </p:sp>
       <p:sp>
         <p:nvSpPr>
-          <p:cNvPr id="1742769984" name="Date Placeholder 2"/>
+          <p:cNvPr id="468285085" name="Date Placeholder 2"/>
           <p:cNvSpPr>
             <a:spLocks noGrp="1"/>
           </p:cNvSpPr>
@@ -216,7 +216,7 @@
       </p:sp>
       <p:sp>
         <p:nvSpPr>
-          <p:cNvPr id="805329733" name="Slide Image Placeholder 3"/>
+          <p:cNvPr id="1529996905" name="Slide Image Placeholder 3"/>
           <p:cNvSpPr>
             <a:spLocks noChangeAspect="1" noGrp="1" noRot="1"/>
           </p:cNvSpPr>
@@ -252,7 +252,7 @@
       </p:sp>
       <p:sp>
         <p:nvSpPr>
-          <p:cNvPr id="905128070" name="Notes Placeholder 4"/>
+          <p:cNvPr id="885050844" name="Notes Placeholder 4"/>
           <p:cNvSpPr>
             <a:spLocks noGrp="1"/>
           </p:cNvSpPr>
@@ -326,7 +326,7 @@
       </p:sp>
       <p:sp>
         <p:nvSpPr>
-          <p:cNvPr id="1132671022" name="Footer Placeholder 5"/>
+          <p:cNvPr id="393750328" name="Footer Placeholder 5"/>
           <p:cNvSpPr>
             <a:spLocks noGrp="1"/>
           </p:cNvSpPr>
@@ -360,7 +360,7 @@
       </p:sp>
       <p:sp>
         <p:nvSpPr>
-          <p:cNvPr id="1411748037" name="Slide Number Placeholder 6"/>
+          <p:cNvPr id="395303115" name="Slide Number Placeholder 6"/>
           <p:cNvSpPr>
             <a:spLocks noGrp="1"/>
           </p:cNvSpPr>
@@ -513,7 +513,7 @@
       </p:grpSpPr>
       <p:sp>
         <p:nvSpPr>
-          <p:cNvPr id="1902183715" name="Slide Image Placeholder 1"/>
+          <p:cNvPr id="1127735743" name="Slide Image Placeholder 1"/>
           <p:cNvSpPr>
             <a:spLocks noChangeAspect="1" noGrp="1" noRot="1"/>
           </p:cNvSpPr>
@@ -530,7 +530,7 @@
       </p:sp>
       <p:sp>
         <p:nvSpPr>
-          <p:cNvPr id="309828802" name="Notes Placeholder 2"/>
+          <p:cNvPr id="1575250304" name="Notes Placeholder 2"/>
           <p:cNvSpPr>
             <a:spLocks noGrp="1"/>
           </p:cNvSpPr>
@@ -555,7 +555,7 @@
       </p:sp>
       <p:sp>
         <p:nvSpPr>
-          <p:cNvPr id="1443937023" name="Slide Number Placeholder 3"/>
+          <p:cNvPr id="853554415" name="Slide Number Placeholder 3"/>
           <p:cNvSpPr>
             <a:spLocks noGrp="1"/>
           </p:cNvSpPr>
@@ -861,7 +861,7 @@
       </p:grpSpPr>
       <p:sp>
         <p:nvSpPr>
-          <p:cNvPr id="1556226403" name="Slide Image Placeholder 1"/>
+          <p:cNvPr id="1350180148" name="Slide Image Placeholder 1"/>
           <p:cNvSpPr>
             <a:spLocks noChangeAspect="1" noGrp="1" noRot="1"/>
           </p:cNvSpPr>
@@ -873,7 +873,7 @@
       </p:sp>
       <p:sp>
         <p:nvSpPr>
-          <p:cNvPr id="1477349620" name="Notes Placeholder 2"/>
+          <p:cNvPr id="1239520364" name="Notes Placeholder 2"/>
           <p:cNvSpPr>
             <a:spLocks noGrp="1"/>
           </p:cNvSpPr>
@@ -895,7 +895,7 @@
       </p:sp>
       <p:sp>
         <p:nvSpPr>
-          <p:cNvPr id="1202488294" name="Slide Number Placeholder 3"/>
+          <p:cNvPr id="1621806183" name="Slide Number Placeholder 3"/>
           <p:cNvSpPr>
             <a:spLocks noGrp="1"/>
           </p:cNvSpPr>
@@ -1456,7 +1456,7 @@
       </p:grpSpPr>
       <p:sp>
         <p:nvSpPr>
-          <p:cNvPr id="356364263" name="Shape 1059"/>
+          <p:cNvPr id="1755107794" name="Shape 1059"/>
           <p:cNvSpPr>
             <a:spLocks noChangeArrowheads="1" noGrp="1"/>
           </p:cNvSpPr>
@@ -1579,7 +1579,7 @@
       </p:sp>
       <p:sp>
         <p:nvSpPr>
-          <p:cNvPr id="258961959" name="Shape 1060"/>
+          <p:cNvPr id="1712102666" name="Shape 1060"/>
           <p:cNvSpPr>
             <a:spLocks noChangeArrowheads="1" noGrp="1"/>
           </p:cNvSpPr>
@@ -1670,7 +1670,7 @@
       </p:sp>
       <p:sp>
         <p:nvSpPr>
-          <p:cNvPr id="1949276358" name="Shape 1061"/>
+          <p:cNvPr id="1759230714" name="Shape 1061"/>
           <p:cNvSpPr>
             <a:spLocks noChangeArrowheads="1" noGrp="1"/>
           </p:cNvSpPr>
@@ -1756,7 +1756,7 @@
       </p:sp>
       <p:sp>
         <p:nvSpPr>
-          <p:cNvPr id="197654408" name="Shape 1062"/>
+          <p:cNvPr id="1394987326" name="Shape 1062"/>
           <p:cNvSpPr>
             <a:spLocks noChangeArrowheads="1" noGrp="1"/>
           </p:cNvSpPr>
@@ -1834,7 +1834,7 @@
       </p:sp>
       <p:sp>
         <p:nvSpPr>
-          <p:cNvPr id="887134880" name="Shape 1063"/>
+          <p:cNvPr id="293956317" name="Shape 1063"/>
           <p:cNvSpPr>
             <a:spLocks noChangeArrowheads="1" noGrp="1"/>
           </p:cNvSpPr>
@@ -1912,7 +1912,7 @@
       </p:sp>
       <p:sp>
         <p:nvSpPr>
-          <p:cNvPr id="1368014166" name="Subtitle 2"/>
+          <p:cNvPr id="2093104821" name="Subtitle 2"/>
           <p:cNvSpPr>
             <a:spLocks noGrp="1"/>
           </p:cNvSpPr>
@@ -2035,7 +2035,7 @@
       </p:sp>
       <p:sp>
         <p:nvSpPr>
-          <p:cNvPr id="1865132098" name="Date Placeholder 3"/>
+          <p:cNvPr id="69941696" name="Date Placeholder 3"/>
           <p:cNvSpPr>
             <a:spLocks noGrp="1"/>
           </p:cNvSpPr>
@@ -2061,7 +2061,7 @@
       </p:sp>
       <p:sp>
         <p:nvSpPr>
-          <p:cNvPr id="1426527025" name="Footer Placeholder 4"/>
+          <p:cNvPr id="1115304775" name="Footer Placeholder 4"/>
           <p:cNvSpPr>
             <a:spLocks noGrp="1"/>
           </p:cNvSpPr>
@@ -2083,7 +2083,7 @@
       </p:sp>
       <p:sp>
         <p:nvSpPr>
-          <p:cNvPr id="1298934782" name="Slide Number Placeholder 5"/>
+          <p:cNvPr id="2062735304" name="Slide Number Placeholder 5"/>
           <p:cNvSpPr>
             <a:spLocks noGrp="1"/>
           </p:cNvSpPr>
@@ -2109,7 +2109,7 @@
       </p:sp>
       <p:sp>
         <p:nvSpPr>
-          <p:cNvPr id="186121881" name="Title 6"/>
+          <p:cNvPr id="976478972" name="Title 6"/>
           <p:cNvSpPr>
             <a:spLocks noGrp="1"/>
           </p:cNvSpPr>
@@ -2169,7 +2169,7 @@
       </p:grpSpPr>
       <p:sp>
         <p:nvSpPr>
-          <p:cNvPr id="109132170" name="Title 1"/>
+          <p:cNvPr id="564118898" name="Title 1"/>
           <p:cNvSpPr>
             <a:spLocks noGrp="1"/>
           </p:cNvSpPr>
@@ -2195,7 +2195,7 @@
       </p:sp>
       <p:sp>
         <p:nvSpPr>
-          <p:cNvPr id="183628789" name="Vertical Text Placeholder 2"/>
+          <p:cNvPr id="721994299" name="Vertical Text Placeholder 2"/>
           <p:cNvSpPr>
             <a:spLocks noGrp="1"/>
           </p:cNvSpPr>
@@ -2261,7 +2261,7 @@
       </p:sp>
       <p:sp>
         <p:nvSpPr>
-          <p:cNvPr id="1975121958" name="Date Placeholder 3"/>
+          <p:cNvPr id="1535840160" name="Date Placeholder 3"/>
           <p:cNvSpPr>
             <a:spLocks noGrp="1"/>
           </p:cNvSpPr>
@@ -2287,7 +2287,7 @@
       </p:sp>
       <p:sp>
         <p:nvSpPr>
-          <p:cNvPr id="1034040043" name="Footer Placeholder 4"/>
+          <p:cNvPr id="925531013" name="Footer Placeholder 4"/>
           <p:cNvSpPr>
             <a:spLocks noGrp="1"/>
           </p:cNvSpPr>
@@ -2309,7 +2309,7 @@
       </p:sp>
       <p:sp>
         <p:nvSpPr>
-          <p:cNvPr id="1922431944" name="Slide Number Placeholder 5"/>
+          <p:cNvPr id="1545271023" name="Slide Number Placeholder 5"/>
           <p:cNvSpPr>
             <a:spLocks noGrp="1"/>
           </p:cNvSpPr>
@@ -2360,7 +2360,7 @@
       </p:grpSpPr>
       <p:sp>
         <p:nvSpPr>
-          <p:cNvPr id="1679431663" name="Vertical Title 1"/>
+          <p:cNvPr id="1021088723" name="Vertical Title 1"/>
           <p:cNvSpPr>
             <a:spLocks noGrp="1"/>
           </p:cNvSpPr>
@@ -2395,7 +2395,7 @@
       </p:sp>
       <p:sp>
         <p:nvSpPr>
-          <p:cNvPr id="954233903" name="Vertical Text Placeholder 2"/>
+          <p:cNvPr id="780081733" name="Vertical Text Placeholder 2"/>
           <p:cNvSpPr>
             <a:spLocks noGrp="1"/>
           </p:cNvSpPr>
@@ -2466,7 +2466,7 @@
       </p:sp>
       <p:sp>
         <p:nvSpPr>
-          <p:cNvPr id="44774211" name="Date Placeholder 3"/>
+          <p:cNvPr id="304962737" name="Date Placeholder 3"/>
           <p:cNvSpPr>
             <a:spLocks noGrp="1"/>
           </p:cNvSpPr>
@@ -2492,7 +2492,7 @@
       </p:sp>
       <p:sp>
         <p:nvSpPr>
-          <p:cNvPr id="1457900322" name="Footer Placeholder 4"/>
+          <p:cNvPr id="2006341394" name="Footer Placeholder 4"/>
           <p:cNvSpPr>
             <a:spLocks noGrp="1"/>
           </p:cNvSpPr>
@@ -2514,7 +2514,7 @@
       </p:sp>
       <p:sp>
         <p:nvSpPr>
-          <p:cNvPr id="847487146" name="Slide Number Placeholder 5"/>
+          <p:cNvPr id="1632303458" name="Slide Number Placeholder 5"/>
           <p:cNvSpPr>
             <a:spLocks noGrp="1"/>
           </p:cNvSpPr>
@@ -2565,7 +2565,7 @@
       </p:grpSpPr>
       <p:sp>
         <p:nvSpPr>
-          <p:cNvPr id="180104850" name="Title 1"/>
+          <p:cNvPr id="1785306545" name="Title 1"/>
           <p:cNvSpPr>
             <a:spLocks noGrp="1"/>
           </p:cNvSpPr>
@@ -2591,7 +2591,7 @@
       </p:sp>
       <p:sp>
         <p:nvSpPr>
-          <p:cNvPr id="1803046006" name="Content Placeholder 2"/>
+          <p:cNvPr id="366700158" name="Content Placeholder 2"/>
           <p:cNvSpPr>
             <a:spLocks noGrp="1"/>
           </p:cNvSpPr>
@@ -2657,7 +2657,7 @@
       </p:sp>
       <p:sp>
         <p:nvSpPr>
-          <p:cNvPr id="1189972914" name="Date Placeholder 3"/>
+          <p:cNvPr id="805335234" name="Date Placeholder 3"/>
           <p:cNvSpPr>
             <a:spLocks noGrp="1"/>
           </p:cNvSpPr>
@@ -2683,7 +2683,7 @@
       </p:sp>
       <p:sp>
         <p:nvSpPr>
-          <p:cNvPr id="1061621291" name="Footer Placeholder 4"/>
+          <p:cNvPr id="1537128308" name="Footer Placeholder 4"/>
           <p:cNvSpPr>
             <a:spLocks noGrp="1"/>
           </p:cNvSpPr>
@@ -2705,7 +2705,7 @@
       </p:sp>
       <p:sp>
         <p:nvSpPr>
-          <p:cNvPr id="1551818391" name="Slide Number Placeholder 5"/>
+          <p:cNvPr id="123761847" name="Slide Number Placeholder 5"/>
           <p:cNvSpPr>
             <a:spLocks noGrp="1"/>
           </p:cNvSpPr>
@@ -2756,7 +2756,7 @@
       </p:grpSpPr>
       <p:sp>
         <p:nvSpPr>
-          <p:cNvPr id="1681812322" name="Title 1"/>
+          <p:cNvPr id="448298808" name="Title 1"/>
           <p:cNvSpPr>
             <a:spLocks noGrp="1"/>
           </p:cNvSpPr>
@@ -2791,7 +2791,7 @@
       </p:sp>
       <p:sp>
         <p:nvSpPr>
-          <p:cNvPr id="912318177" name="Text Placeholder 2"/>
+          <p:cNvPr id="1774419778" name="Text Placeholder 2"/>
           <p:cNvSpPr>
             <a:spLocks noGrp="1"/>
           </p:cNvSpPr>
@@ -2913,7 +2913,7 @@
       </p:sp>
       <p:sp>
         <p:nvSpPr>
-          <p:cNvPr id="864048526" name="Date Placeholder 3"/>
+          <p:cNvPr id="1491595421" name="Date Placeholder 3"/>
           <p:cNvSpPr>
             <a:spLocks noGrp="1"/>
           </p:cNvSpPr>
@@ -2939,7 +2939,7 @@
       </p:sp>
       <p:sp>
         <p:nvSpPr>
-          <p:cNvPr id="1524671496" name="Footer Placeholder 4"/>
+          <p:cNvPr id="484596178" name="Footer Placeholder 4"/>
           <p:cNvSpPr>
             <a:spLocks noGrp="1"/>
           </p:cNvSpPr>
@@ -2961,7 +2961,7 @@
       </p:sp>
       <p:sp>
         <p:nvSpPr>
-          <p:cNvPr id="1945298927" name="Slide Number Placeholder 5"/>
+          <p:cNvPr id="1933617345" name="Slide Number Placeholder 5"/>
           <p:cNvSpPr>
             <a:spLocks noGrp="1"/>
           </p:cNvSpPr>
@@ -3012,7 +3012,7 @@
       </p:grpSpPr>
       <p:sp>
         <p:nvSpPr>
-          <p:cNvPr id="472785746" name="Title 1"/>
+          <p:cNvPr id="1541661850" name="Title 1"/>
           <p:cNvSpPr>
             <a:spLocks noGrp="1"/>
           </p:cNvSpPr>
@@ -3038,7 +3038,7 @@
       </p:sp>
       <p:sp>
         <p:nvSpPr>
-          <p:cNvPr id="292883308" name="Content Placeholder 2"/>
+          <p:cNvPr id="372054376" name="Content Placeholder 2"/>
           <p:cNvSpPr>
             <a:spLocks noGrp="1"/>
           </p:cNvSpPr>
@@ -3137,7 +3137,7 @@
       </p:sp>
       <p:sp>
         <p:nvSpPr>
-          <p:cNvPr id="1940510747" name="Content Placeholder 3"/>
+          <p:cNvPr id="1411832379" name="Content Placeholder 3"/>
           <p:cNvSpPr>
             <a:spLocks noGrp="1"/>
           </p:cNvSpPr>
@@ -3236,7 +3236,7 @@
       </p:sp>
       <p:sp>
         <p:nvSpPr>
-          <p:cNvPr id="1349816581" name="Date Placeholder 4"/>
+          <p:cNvPr id="271907064" name="Date Placeholder 4"/>
           <p:cNvSpPr>
             <a:spLocks noGrp="1"/>
           </p:cNvSpPr>
@@ -3262,7 +3262,7 @@
       </p:sp>
       <p:sp>
         <p:nvSpPr>
-          <p:cNvPr id="1961476029" name="Footer Placeholder 5"/>
+          <p:cNvPr id="907352700" name="Footer Placeholder 5"/>
           <p:cNvSpPr>
             <a:spLocks noGrp="1"/>
           </p:cNvSpPr>
@@ -3284,7 +3284,7 @@
       </p:sp>
       <p:sp>
         <p:nvSpPr>
-          <p:cNvPr id="1343047573" name="Slide Number Placeholder 6"/>
+          <p:cNvPr id="1666797435" name="Slide Number Placeholder 6"/>
           <p:cNvSpPr>
             <a:spLocks noGrp="1"/>
           </p:cNvSpPr>
@@ -3335,7 +3335,7 @@
       </p:grpSpPr>
       <p:sp>
         <p:nvSpPr>
-          <p:cNvPr id="15625489" name="Title 1"/>
+          <p:cNvPr id="1190728594" name="Title 1"/>
           <p:cNvSpPr>
             <a:spLocks noGrp="1"/>
           </p:cNvSpPr>
@@ -3365,7 +3365,7 @@
       </p:sp>
       <p:sp>
         <p:nvSpPr>
-          <p:cNvPr id="2089018143" name="Text Placeholder 2"/>
+          <p:cNvPr id="1810455456" name="Text Placeholder 2"/>
           <p:cNvSpPr>
             <a:spLocks noGrp="1"/>
           </p:cNvSpPr>
@@ -3433,7 +3433,7 @@
       </p:sp>
       <p:sp>
         <p:nvSpPr>
-          <p:cNvPr id="762697139" name="Content Placeholder 3"/>
+          <p:cNvPr id="1811587692" name="Content Placeholder 3"/>
           <p:cNvSpPr>
             <a:spLocks noGrp="1"/>
           </p:cNvSpPr>
@@ -3532,7 +3532,7 @@
       </p:sp>
       <p:sp>
         <p:nvSpPr>
-          <p:cNvPr id="551608356" name="Text Placeholder 4"/>
+          <p:cNvPr id="1597196160" name="Text Placeholder 4"/>
           <p:cNvSpPr>
             <a:spLocks noGrp="1"/>
           </p:cNvSpPr>
@@ -3600,7 +3600,7 @@
       </p:sp>
       <p:sp>
         <p:nvSpPr>
-          <p:cNvPr id="539265180" name="Content Placeholder 5"/>
+          <p:cNvPr id="1781725988" name="Content Placeholder 5"/>
           <p:cNvSpPr>
             <a:spLocks noGrp="1"/>
           </p:cNvSpPr>
@@ -3699,7 +3699,7 @@
       </p:sp>
       <p:sp>
         <p:nvSpPr>
-          <p:cNvPr id="258480381" name="Date Placeholder 6"/>
+          <p:cNvPr id="14930599" name="Date Placeholder 6"/>
           <p:cNvSpPr>
             <a:spLocks noGrp="1"/>
           </p:cNvSpPr>
@@ -3725,7 +3725,7 @@
       </p:sp>
       <p:sp>
         <p:nvSpPr>
-          <p:cNvPr id="1363854497" name="Footer Placeholder 7"/>
+          <p:cNvPr id="1464510173" name="Footer Placeholder 7"/>
           <p:cNvSpPr>
             <a:spLocks noGrp="1"/>
           </p:cNvSpPr>
@@ -3747,7 +3747,7 @@
       </p:sp>
       <p:sp>
         <p:nvSpPr>
-          <p:cNvPr id="107980012" name="Slide Number Placeholder 8"/>
+          <p:cNvPr id="1825602449" name="Slide Number Placeholder 8"/>
           <p:cNvSpPr>
             <a:spLocks noGrp="1"/>
           </p:cNvSpPr>
@@ -3798,7 +3798,7 @@
       </p:grpSpPr>
       <p:sp>
         <p:nvSpPr>
-          <p:cNvPr id="226852839" name="Title 1"/>
+          <p:cNvPr id="440138987" name="Title 1"/>
           <p:cNvSpPr>
             <a:spLocks noGrp="1"/>
           </p:cNvSpPr>
@@ -3824,7 +3824,7 @@
       </p:sp>
       <p:sp>
         <p:nvSpPr>
-          <p:cNvPr id="852692340" name="Date Placeholder 2"/>
+          <p:cNvPr id="845610094" name="Date Placeholder 2"/>
           <p:cNvSpPr>
             <a:spLocks noGrp="1"/>
           </p:cNvSpPr>
@@ -3850,7 +3850,7 @@
       </p:sp>
       <p:sp>
         <p:nvSpPr>
-          <p:cNvPr id="1220551241" name="Footer Placeholder 3"/>
+          <p:cNvPr id="917744716" name="Footer Placeholder 3"/>
           <p:cNvSpPr>
             <a:spLocks noGrp="1"/>
           </p:cNvSpPr>
@@ -3872,7 +3872,7 @@
       </p:sp>
       <p:sp>
         <p:nvSpPr>
-          <p:cNvPr id="1864184394" name="Slide Number Placeholder 4"/>
+          <p:cNvPr id="1972716958" name="Slide Number Placeholder 4"/>
           <p:cNvSpPr>
             <a:spLocks noGrp="1"/>
           </p:cNvSpPr>
@@ -3923,7 +3923,7 @@
       </p:grpSpPr>
       <p:sp>
         <p:nvSpPr>
-          <p:cNvPr id="260911977" name="Date Placeholder 1"/>
+          <p:cNvPr id="1031281841" name="Date Placeholder 1"/>
           <p:cNvSpPr>
             <a:spLocks noGrp="1"/>
           </p:cNvSpPr>
@@ -3949,7 +3949,7 @@
       </p:sp>
       <p:sp>
         <p:nvSpPr>
-          <p:cNvPr id="1668567086" name="Footer Placeholder 2"/>
+          <p:cNvPr id="706608013" name="Footer Placeholder 2"/>
           <p:cNvSpPr>
             <a:spLocks noGrp="1"/>
           </p:cNvSpPr>
@@ -3971,7 +3971,7 @@
       </p:sp>
       <p:sp>
         <p:nvSpPr>
-          <p:cNvPr id="1240948217" name="Slide Number Placeholder 3"/>
+          <p:cNvPr id="1965488904" name="Slide Number Placeholder 3"/>
           <p:cNvSpPr>
             <a:spLocks noGrp="1"/>
           </p:cNvSpPr>
@@ -4022,7 +4022,7 @@
       </p:grpSpPr>
       <p:sp>
         <p:nvSpPr>
-          <p:cNvPr id="1088391444" name="Title 1"/>
+          <p:cNvPr id="663698224" name="Title 1"/>
           <p:cNvSpPr>
             <a:spLocks noGrp="1"/>
           </p:cNvSpPr>
@@ -4057,7 +4057,7 @@
       </p:sp>
       <p:sp>
         <p:nvSpPr>
-          <p:cNvPr id="413604538" name="Content Placeholder 2"/>
+          <p:cNvPr id="1153665418" name="Content Placeholder 2"/>
           <p:cNvSpPr>
             <a:spLocks noGrp="1"/>
           </p:cNvSpPr>
@@ -4156,7 +4156,7 @@
       </p:sp>
       <p:sp>
         <p:nvSpPr>
-          <p:cNvPr id="1023893012" name="Text Placeholder 3"/>
+          <p:cNvPr id="1983810428" name="Text Placeholder 3"/>
           <p:cNvSpPr>
             <a:spLocks noGrp="1"/>
           </p:cNvSpPr>
@@ -4224,7 +4224,7 @@
       </p:sp>
       <p:sp>
         <p:nvSpPr>
-          <p:cNvPr id="127889249" name="Date Placeholder 4"/>
+          <p:cNvPr id="1734900050" name="Date Placeholder 4"/>
           <p:cNvSpPr>
             <a:spLocks noGrp="1"/>
           </p:cNvSpPr>
@@ -4250,7 +4250,7 @@
       </p:sp>
       <p:sp>
         <p:nvSpPr>
-          <p:cNvPr id="990208103" name="Footer Placeholder 5"/>
+          <p:cNvPr id="14652199" name="Footer Placeholder 5"/>
           <p:cNvSpPr>
             <a:spLocks noGrp="1"/>
           </p:cNvSpPr>
@@ -4272,7 +4272,7 @@
       </p:sp>
       <p:sp>
         <p:nvSpPr>
-          <p:cNvPr id="2071399367" name="Slide Number Placeholder 6"/>
+          <p:cNvPr id="366412332" name="Slide Number Placeholder 6"/>
           <p:cNvSpPr>
             <a:spLocks noGrp="1"/>
           </p:cNvSpPr>
@@ -4323,7 +4323,7 @@
       </p:grpSpPr>
       <p:sp>
         <p:nvSpPr>
-          <p:cNvPr id="48978094" name="Title 1"/>
+          <p:cNvPr id="95336275" name="Title 1"/>
           <p:cNvSpPr>
             <a:spLocks noGrp="1"/>
           </p:cNvSpPr>
@@ -4358,7 +4358,7 @@
       </p:sp>
       <p:sp>
         <p:nvSpPr>
-          <p:cNvPr id="313315122" name="Picture Placeholder 2"/>
+          <p:cNvPr id="991280090" name="Picture Placeholder 2"/>
           <p:cNvSpPr>
             <a:spLocks noGrp="1"/>
           </p:cNvSpPr>
@@ -4422,7 +4422,7 @@
       </p:sp>
       <p:sp>
         <p:nvSpPr>
-          <p:cNvPr id="1713243693" name="Text Placeholder 3"/>
+          <p:cNvPr id="2002798017" name="Text Placeholder 3"/>
           <p:cNvSpPr>
             <a:spLocks noGrp="1"/>
           </p:cNvSpPr>
@@ -4490,7 +4490,7 @@
       </p:sp>
       <p:sp>
         <p:nvSpPr>
-          <p:cNvPr id="1998488062" name="Date Placeholder 4"/>
+          <p:cNvPr id="348808672" name="Date Placeholder 4"/>
           <p:cNvSpPr>
             <a:spLocks noGrp="1"/>
           </p:cNvSpPr>
@@ -4516,7 +4516,7 @@
       </p:sp>
       <p:sp>
         <p:nvSpPr>
-          <p:cNvPr id="335647345" name="Footer Placeholder 5"/>
+          <p:cNvPr id="2146526283" name="Footer Placeholder 5"/>
           <p:cNvSpPr>
             <a:spLocks noGrp="1"/>
           </p:cNvSpPr>
@@ -4538,7 +4538,7 @@
       </p:sp>
       <p:sp>
         <p:nvSpPr>
-          <p:cNvPr id="687288768" name="Slide Number Placeholder 6"/>
+          <p:cNvPr id="605214084" name="Slide Number Placeholder 6"/>
           <p:cNvSpPr>
             <a:spLocks noGrp="1"/>
           </p:cNvSpPr>
@@ -4594,7 +4594,7 @@
       </p:grpSpPr>
       <p:sp>
         <p:nvSpPr>
-          <p:cNvPr id="1439381735" name="Shape 1059"/>
+          <p:cNvPr id="1340825685" name="Shape 1059"/>
           <p:cNvSpPr>
             <a:spLocks noChangeArrowheads="1" noGrp="1"/>
           </p:cNvSpPr>
@@ -4672,7 +4672,7 @@
       </p:sp>
       <p:sp>
         <p:nvSpPr>
-          <p:cNvPr id="167389954" name="Shape 1060"/>
+          <p:cNvPr id="1829524164" name="Shape 1060"/>
           <p:cNvSpPr>
             <a:spLocks noChangeArrowheads="1" noGrp="1"/>
           </p:cNvSpPr>
@@ -4753,7 +4753,7 @@
       </p:sp>
       <p:sp>
         <p:nvSpPr>
-          <p:cNvPr id="180613736" name="Shape 1061"/>
+          <p:cNvPr id="854662337" name="Shape 1061"/>
           <p:cNvSpPr>
             <a:spLocks noChangeArrowheads="1" noGrp="1"/>
           </p:cNvSpPr>
@@ -4871,7 +4871,7 @@
       </p:sp>
       <p:sp>
         <p:nvSpPr>
-          <p:cNvPr id="1434891356" name="Title 1"/>
+          <p:cNvPr id="1797535812" name="Title 1"/>
           <p:cNvSpPr>
             <a:spLocks noGrp="1"/>
           </p:cNvSpPr>
@@ -4907,7 +4907,7 @@
       </p:sp>
       <p:sp>
         <p:nvSpPr>
-          <p:cNvPr id="717955646" name="Text Placeholder 2"/>
+          <p:cNvPr id="1711858455" name="Text Placeholder 2"/>
           <p:cNvSpPr>
             <a:spLocks noGrp="1"/>
           </p:cNvSpPr>
@@ -4983,7 +4983,7 @@
       </p:sp>
       <p:sp>
         <p:nvSpPr>
-          <p:cNvPr id="163606420" name="Date Placeholder 3"/>
+          <p:cNvPr id="531770620" name="Date Placeholder 3"/>
           <p:cNvSpPr>
             <a:spLocks noGrp="1"/>
           </p:cNvSpPr>
@@ -5027,7 +5027,7 @@
       </p:sp>
       <p:sp>
         <p:nvSpPr>
-          <p:cNvPr id="1046803321" name="Footer Placeholder 4"/>
+          <p:cNvPr id="1598089064" name="Footer Placeholder 4"/>
           <p:cNvSpPr>
             <a:spLocks noGrp="1"/>
           </p:cNvSpPr>
@@ -5067,7 +5067,7 @@
       </p:sp>
       <p:sp>
         <p:nvSpPr>
-          <p:cNvPr id="2017380843" name="Slide Number Placeholder 5"/>
+          <p:cNvPr id="1589704041" name="Slide Number Placeholder 5"/>
           <p:cNvSpPr>
             <a:spLocks noGrp="1"/>
           </p:cNvSpPr>
@@ -5415,7 +5415,7 @@
       </p:grpSpPr>
       <p:sp>
         <p:nvSpPr>
-          <p:cNvPr id="828989443" name="Title 1"/>
+          <p:cNvPr id="847872922" name="Title 1"/>
           <p:cNvSpPr>
             <a:spLocks noGrp="1"/>
           </p:cNvSpPr>
@@ -5452,7 +5452,7 @@
       </p:sp>
       <p:sp>
         <p:nvSpPr>
-          <p:cNvPr id="969846937" name=""/>
+          <p:cNvPr id="1820945839" name=""/>
           <p:cNvSpPr txBox="1"/>
           <p:nvPr/>
         </p:nvSpPr>
@@ -5871,8 +5871,8 @@
         </p:blipFill>
         <p:spPr bwMode="auto">
           <a:xfrm flipH="0" flipV="0">
-            <a:off x="1276348" y="1162049"/>
-            <a:ext cx="8879779" cy="7429500"/>
+            <a:off x="1133408" y="1200149"/>
+            <a:ext cx="6489069" cy="5429250"/>
           </a:xfrm>
           <a:prstGeom prst="rect">
             <a:avLst/>
@@ -6023,7 +6023,7 @@
       </p:grpSpPr>
       <p:sp>
         <p:nvSpPr>
-          <p:cNvPr id="2145972485" name="Title 1"/>
+          <p:cNvPr id="492430788" name="Title 1"/>
           <p:cNvSpPr>
             <a:spLocks noGrp="1"/>
           </p:cNvSpPr>
@@ -6049,7 +6049,7 @@
       </p:sp>
       <p:sp>
         <p:nvSpPr>
-          <p:cNvPr id="1663473207" name="Content Placeholder 2"/>
+          <p:cNvPr id="1594365626" name="Content Placeholder 2"/>
           <p:cNvSpPr>
             <a:spLocks noGrp="1"/>
           </p:cNvSpPr>
